--- a/docs/교재/실전반_오프라인/02회차/실전반_오프라인_02회차.pptx
+++ b/docs/교재/실전반_오프라인/02회차/실전반_오프라인_02회차.pptx
@@ -6485,7 +6485,7 @@
       </p:sp>
       <p:pic>
         <p:nvPicPr>
-          <p:cNvPr id="6" name="삽화:SOP문서_all.svg" descr="illust_278606568767265970_1791717219.png"/>
+          <p:cNvPr id="6" name="삽화:SOP문서_all.svg" descr="illust_8948576843651638945_1791717219.png"/>
           <p:cNvPicPr>
             <a:picLocks noChangeAspect="1"/>
           </p:cNvPicPr>
@@ -8867,7 +8867,7 @@
                 <a:ea typeface="맑은 고딕"/>
                 <a:cs typeface="맑은 고딕"/>
               </a:rPr>
-              <a:t>원격으로 보내는 조치는 원격 자동일 때만 후보에 남고, 사람이 현장에서 하는 정비 작업은 어느 운전 모드에서도 남는다.</a:t>
+              <a:t>팬과 부하를 원격으로 바꾸는 세 조치는 원격 자동일 때만 후보에 남고, 현장의 정비 작업은 어느 운전 모드에서도 남는다.</a:t>
             </a:r>
           </a:p>
         </p:txBody>
@@ -8942,7 +8942,7 @@
       </p:sp>
       <p:pic>
         <p:nvPicPr>
-          <p:cNvPr id="6" name="삽화:운전모드_3.svg" descr="illust_5949875185086321487_1791717219.png"/>
+          <p:cNvPr id="6" name="삽화:운전모드_3.svg" descr="illust_7892545751234338359_1791717219.png"/>
           <p:cNvPicPr>
             <a:picLocks noChangeAspect="1"/>
           </p:cNvPicPr>
@@ -14054,7 +14054,7 @@
       </p:sp>
       <p:pic>
         <p:nvPicPr>
-          <p:cNvPr id="6" name="삽화:결정표_4.svg" descr="illust_4179163213345025737_1791717219.png"/>
+          <p:cNvPr id="6" name="삽화:결정표_4.svg" descr="illust_970819746823442322_1791717219.png"/>
           <p:cNvPicPr>
             <a:picLocks noChangeAspect="1"/>
           </p:cNvPicPr>
@@ -16715,7 +16715,7 @@
       </p:sp>
       <p:pic>
         <p:nvPicPr>
-          <p:cNvPr id="6" name="삽화:수직선_gt.svg" descr="illust_6819673608055266444_1791717219.png"/>
+          <p:cNvPr id="6" name="삽화:수직선_gt.svg" descr="illust_6962431147675250619_1791717219.png"/>
           <p:cNvPicPr>
             <a:picLocks noChangeAspect="1"/>
           </p:cNvPicPr>
@@ -19845,7 +19845,7 @@
       </p:sp>
       <p:pic>
         <p:nvPicPr>
-          <p:cNvPr id="6" name="삽화:성과경로_5.svg" descr="illust_6856895006601066735_1791717219.png"/>
+          <p:cNvPr id="6" name="삽화:성과경로_5.svg" descr="illust_1367341401865777881_1791717219.png"/>
           <p:cNvPicPr>
             <a:picLocks noChangeAspect="1"/>
           </p:cNvPicPr>
@@ -22295,7 +22295,7 @@
       </p:sp>
       <p:pic>
         <p:nvPicPr>
-          <p:cNvPr id="6" name="삽화:가정분석_2.svg" descr="illust_280783545487355377_1791717219.png"/>
+          <p:cNvPr id="6" name="삽화:가정분석_2.svg" descr="illust_4835692146693241628_1791717219.png"/>
           <p:cNvPicPr>
             <a:picLocks noChangeAspect="1"/>
           </p:cNvPicPr>
@@ -23020,7 +23020,7 @@
                 <a:ea typeface="맑은 고딕"/>
                 <a:cs typeface="맑은 고딕"/>
               </a:rPr>
-              <a:t>조치 절차 · 판단 규칙 · 성과 기준: 조치 하나를 고르기까지</a:t>
+              <a:t>조치 절차 · 판단 규칙 · 성과 기준</a:t>
             </a:r>
           </a:p>
         </p:txBody>
@@ -23551,7 +23551,7 @@
                 <a:ea typeface="맑은 고딕"/>
                 <a:cs typeface="맑은 고딕"/>
               </a:rPr>
-              <a:t>조치 허용 · 제외 기능 실행하기</a:t>
+              <a:t>설비 조건별 조치를 가리는 판단 기능 만들기</a:t>
             </a:r>
           </a:p>
         </p:txBody>
@@ -33688,7 +33688,7 @@
       </p:sp>
       <p:pic>
         <p:nvPicPr>
-          <p:cNvPr id="6" name="삽화:조치후보_0.svg" descr="illust_1472827194098924385_1791717219.png"/>
+          <p:cNvPr id="6" name="삽화:조치후보_0.svg" descr="illust_8839395950984750616_1791717219.png"/>
           <p:cNvPicPr>
             <a:picLocks noChangeAspect="1"/>
           </p:cNvPicPr>
@@ -34073,7 +34073,7 @@
       </p:sp>
       <p:pic>
         <p:nvPicPr>
-          <p:cNvPr id="6" name="삽화:조치후보_전체.svg" descr="illust_6929579859148540010_1791717219.png"/>
+          <p:cNvPr id="6" name="삽화:조치후보_전체.svg" descr="illust_4956092233554446639_1791717219.png"/>
           <p:cNvPicPr>
             <a:picLocks noChangeAspect="1"/>
           </p:cNvPicPr>

--- a/docs/교재/실전반_오프라인/02회차/실전반_오프라인_02회차.pptx
+++ b/docs/교재/실전반_오프라인/02회차/실전반_오프라인_02회차.pptx
@@ -6485,7 +6485,7 @@
       </p:sp>
       <p:pic>
         <p:nvPicPr>
-          <p:cNvPr id="6" name="삽화:SOP문서_all.svg" descr="illust_8948576843651638945_1791717219.png"/>
+          <p:cNvPr id="6" name="삽화:SOP문서_all.svg" descr="illust_6108698039336325785_1791717219.png"/>
           <p:cNvPicPr>
             <a:picLocks noChangeAspect="1"/>
           </p:cNvPicPr>
@@ -8942,7 +8942,7 @@
       </p:sp>
       <p:pic>
         <p:nvPicPr>
-          <p:cNvPr id="6" name="삽화:운전모드_3.svg" descr="illust_7892545751234338359_1791717219.png"/>
+          <p:cNvPr id="6" name="삽화:운전모드_3.svg" descr="illust_5514626896749361879_1791717219.png"/>
           <p:cNvPicPr>
             <a:picLocks noChangeAspect="1"/>
           </p:cNvPicPr>
@@ -14054,7 +14054,7 @@
       </p:sp>
       <p:pic>
         <p:nvPicPr>
-          <p:cNvPr id="6" name="삽화:결정표_4.svg" descr="illust_970819746823442322_1791717219.png"/>
+          <p:cNvPr id="6" name="삽화:결정표_4.svg" descr="illust_3682967592907436746_1791717219.png"/>
           <p:cNvPicPr>
             <a:picLocks noChangeAspect="1"/>
           </p:cNvPicPr>
@@ -16715,7 +16715,7 @@
       </p:sp>
       <p:pic>
         <p:nvPicPr>
-          <p:cNvPr id="6" name="삽화:수직선_gt.svg" descr="illust_6962431147675250619_1791717219.png"/>
+          <p:cNvPr id="6" name="삽화:수직선_gt.svg" descr="illust_6174481403014340703_1791717219.png"/>
           <p:cNvPicPr>
             <a:picLocks noChangeAspect="1"/>
           </p:cNvPicPr>
@@ -19034,8 +19034,8 @@
         </p:nvSpPr>
         <p:spPr>
           <a:xfrm>
-            <a:off x="548640" y="1978215"/>
-            <a:ext cx="5181447" cy="4026281"/>
+            <a:off x="548640" y="2128647"/>
+            <a:ext cx="5181447" cy="3725418"/>
           </a:xfrm>
           <a:prstGeom prst="roundRect">
             <a:avLst>
@@ -19065,7 +19065,7 @@
         </p:nvSpPr>
         <p:spPr>
           <a:xfrm>
-            <a:off x="822959" y="2179383"/>
+            <a:off x="822959" y="2329815"/>
             <a:ext cx="731520" cy="731520"/>
           </a:xfrm>
           <a:prstGeom prst="ellipse">
@@ -19102,7 +19102,7 @@
         </p:blipFill>
         <p:spPr>
           <a:xfrm>
-            <a:off x="976579" y="2333002"/>
+            <a:off x="976579" y="2483434"/>
             <a:ext cx="424281" cy="424281"/>
           </a:xfrm>
           <a:prstGeom prst="rect">
@@ -19118,7 +19118,7 @@
         </p:nvSpPr>
         <p:spPr>
           <a:xfrm>
-            <a:off x="1691640" y="2179383"/>
+            <a:off x="1691640" y="2329815"/>
             <a:ext cx="3855567" cy="731520"/>
           </a:xfrm>
           <a:prstGeom prst="rect">
@@ -19157,8 +19157,8 @@
         </p:nvSpPr>
         <p:spPr>
           <a:xfrm>
-            <a:off x="822959" y="3029775"/>
-            <a:ext cx="4632807" cy="2426081"/>
+            <a:off x="822959" y="3180207"/>
+            <a:ext cx="4632807" cy="2125218"/>
           </a:xfrm>
           <a:prstGeom prst="rect">
             <a:avLst/>
@@ -19241,7 +19241,7 @@
         </p:nvSpPr>
         <p:spPr>
           <a:xfrm>
-            <a:off x="868680" y="5547296"/>
+            <a:off x="868680" y="5396865"/>
             <a:ext cx="1325879" cy="292608"/>
           </a:xfrm>
           <a:prstGeom prst="roundRect">
@@ -19272,7 +19272,7 @@
         </p:nvSpPr>
         <p:spPr>
           <a:xfrm>
-            <a:off x="868680" y="5547296"/>
+            <a:off x="868680" y="5396865"/>
             <a:ext cx="1325879" cy="292608"/>
           </a:xfrm>
           <a:prstGeom prst="rect">
@@ -19311,8 +19311,8 @@
         </p:nvSpPr>
         <p:spPr>
           <a:xfrm>
-            <a:off x="6461607" y="1978215"/>
-            <a:ext cx="5181447" cy="4026281"/>
+            <a:off x="6461607" y="2128647"/>
+            <a:ext cx="5181447" cy="3725418"/>
           </a:xfrm>
           <a:prstGeom prst="roundRect">
             <a:avLst>
@@ -19344,7 +19344,7 @@
         </p:nvSpPr>
         <p:spPr>
           <a:xfrm>
-            <a:off x="6735927" y="2179383"/>
+            <a:off x="6735927" y="2329815"/>
             <a:ext cx="731520" cy="731520"/>
           </a:xfrm>
           <a:prstGeom prst="ellipse">
@@ -19381,7 +19381,7 @@
         </p:blipFill>
         <p:spPr>
           <a:xfrm>
-            <a:off x="6889546" y="2333002"/>
+            <a:off x="6889546" y="2483434"/>
             <a:ext cx="424281" cy="424281"/>
           </a:xfrm>
           <a:prstGeom prst="rect">
@@ -19397,7 +19397,7 @@
         </p:nvSpPr>
         <p:spPr>
           <a:xfrm>
-            <a:off x="7604607" y="2179383"/>
+            <a:off x="7604607" y="2329815"/>
             <a:ext cx="3855567" cy="731520"/>
           </a:xfrm>
           <a:prstGeom prst="rect">
@@ -19423,7 +19423,7 @@
                 <a:ea typeface="맑은 고딕"/>
                 <a:cs typeface="맑은 고딕"/>
               </a:rPr>
-              <a:t>KPI (Key Performance Indicator)</a:t>
+              <a:t>KPI (핵심 성과 지표)</a:t>
             </a:r>
           </a:p>
         </p:txBody>
@@ -19436,8 +19436,8 @@
         </p:nvSpPr>
         <p:spPr>
           <a:xfrm>
-            <a:off x="6735927" y="3029775"/>
-            <a:ext cx="4632807" cy="2426081"/>
+            <a:off x="6735927" y="3180207"/>
+            <a:ext cx="4632807" cy="2125218"/>
           </a:xfrm>
           <a:prstGeom prst="rect">
             <a:avLst/>
@@ -19465,7 +19465,7 @@
                 <a:ea typeface="맑은 고딕"/>
                 <a:cs typeface="맑은 고딕"/>
               </a:rPr>
-              <a:t>• 목표를 얼마나 이루었는지를 수치로 재는 핵심 성과 지표이다</a:t>
+              <a:t>• 목표를 얼마나 이루었는지를 수치로 재는 지표이다</a:t>
             </a:r>
           </a:p>
           <a:p>
@@ -19541,7 +19541,7 @@
         </p:nvSpPr>
         <p:spPr>
           <a:xfrm>
-            <a:off x="6781647" y="5547296"/>
+            <a:off x="6781647" y="5396865"/>
             <a:ext cx="1021080" cy="292608"/>
           </a:xfrm>
           <a:prstGeom prst="roundRect">
@@ -19572,7 +19572,7 @@
         </p:nvSpPr>
         <p:spPr>
           <a:xfrm>
-            <a:off x="6781647" y="5547296"/>
+            <a:off x="6781647" y="5396865"/>
             <a:ext cx="1021080" cy="292608"/>
           </a:xfrm>
           <a:prstGeom prst="rect">
@@ -19845,7 +19845,7 @@
       </p:sp>
       <p:pic>
         <p:nvPicPr>
-          <p:cNvPr id="6" name="삽화:성과경로_5.svg" descr="illust_1367341401865777881_1791717219.png"/>
+          <p:cNvPr id="6" name="삽화:성과경로_5.svg" descr="illust_3350368796753516818_1791717219.png"/>
           <p:cNvPicPr>
             <a:picLocks noChangeAspect="1"/>
           </p:cNvPicPr>
@@ -22295,7 +22295,7 @@
       </p:sp>
       <p:pic>
         <p:nvPicPr>
-          <p:cNvPr id="6" name="삽화:가정분석_2.svg" descr="illust_4835692146693241628_1791717219.png"/>
+          <p:cNvPr id="6" name="삽화:가정분석_2.svg" descr="illust_6881651119943804093_1791717219.png"/>
           <p:cNvPicPr>
             <a:picLocks noChangeAspect="1"/>
           </p:cNvPicPr>
@@ -33688,7 +33688,7 @@
       </p:sp>
       <p:pic>
         <p:nvPicPr>
-          <p:cNvPr id="6" name="삽화:조치후보_0.svg" descr="illust_8839395950984750616_1791717219.png"/>
+          <p:cNvPr id="6" name="삽화:조치후보_0.svg" descr="illust_915679323974965219_1791717219.png"/>
           <p:cNvPicPr>
             <a:picLocks noChangeAspect="1"/>
           </p:cNvPicPr>
@@ -34073,7 +34073,7 @@
       </p:sp>
       <p:pic>
         <p:nvPicPr>
-          <p:cNvPr id="6" name="삽화:조치후보_전체.svg" descr="illust_4956092233554446639_1791717219.png"/>
+          <p:cNvPr id="6" name="삽화:조치후보_전체.svg" descr="illust_5657025841967355613_1791717219.png"/>
           <p:cNvPicPr>
             <a:picLocks noChangeAspect="1"/>
           </p:cNvPicPr>

--- a/docs/교재/실전반_오프라인/02회차/실전반_오프라인_02회차.pptx
+++ b/docs/교재/실전반_오프라인/02회차/실전반_오프라인_02회차.pptx
@@ -1664,7 +1664,7 @@
           <a:lstStyle/>
           <a:p>
             <a:r>
-              <a:t>그 저울질의 실제 결과입니다. 네 후보에 점수가 매겨졌고 팬 최대 운전이 가장 높았습니다. 점수는 조치마다 성과 지표, 납기, 예측 유온, 품질 같은 항목에서 얻는 것과 잃는 것을 더한 값입니다. 부하를 낮추는 두 조치는 유온을 더 내리는데도 점수가 낮습니다. 부하를 낮추면 생산이 줄어, 유온에서 얻은 것보다 납기에서 잃은 것이 더 컸기 때문입니다. 이 둘은 점수가 +2.75로 같아서, 표의 둘째 줄과 셋째 줄 사이의 순서에는 뜻을 두지 않습니다. 쿨러 핀 세척은 원인을 없애지만 설비를 세우고 하는 작업이어서 지금의 유온을 내리지 못하므로 예측 유온이 가장 높고 점수는 가장 낮습니다.</a:t>
+              <a:t>그 저울질의 실제 결과입니다. 네 후보에 점수가 매겨졌고 팬 최대 운전이 가장 높았습니다. 점수는 조치마다 성과 지표, 납기, 예측 유온, 품질 같은 항목에서 얻는 것과 잃는 것을 더한 값입니다. 부하를 낮추는 두 조치는 유온을 더 내리는데도 점수가 낮습니다. 부하를 낮추면 생산이 줄어, 유온에서 얻은 것보다 납기에서 잃은 것이 더 컸기 때문입니다. 이 둘은 점수가 +2.75로 같아서 순위도 공동 2순위로 같습니다. 쿨러 핀 세척은 원인을 없애지만 설비를 세우고 하는 작업이어서 지금의 유온을 내리지 못하므로 예측 유온이 가장 높고 점수는 가장 낮습니다.</a:t>
             </a:r>
           </a:p>
         </p:txBody>
@@ -7616,7 +7616,7 @@
       </p:sp>
       <p:pic>
         <p:nvPicPr>
-          <p:cNvPr id="6" name="삽화:SOP문서_all.svg" descr="illust_5736719852763488928_1791770880.png"/>
+          <p:cNvPr id="6" name="삽화:SOP문서_all.svg" descr="illust_1639074730109756826_1791770880.png"/>
           <p:cNvPicPr>
             <a:picLocks noChangeAspect="1"/>
           </p:cNvPicPr>
@@ -10136,7 +10136,7 @@
       </p:sp>
       <p:pic>
         <p:nvPicPr>
-          <p:cNvPr id="6" name="삽화:운전모드_3.svg" descr="illust_7507579224274083428_1791769661.png"/>
+          <p:cNvPr id="6" name="삽화:운전모드_3.svg" descr="illust_5312487430237631988_1791769661.png"/>
           <p:cNvPicPr>
             <a:picLocks noChangeAspect="1"/>
           </p:cNvPicPr>
@@ -16296,7 +16296,7 @@
       </p:sp>
       <p:pic>
         <p:nvPicPr>
-          <p:cNvPr id="6" name="삽화:결정표_4.svg" descr="illust_4451259562011278722_1791769661.png"/>
+          <p:cNvPr id="6" name="삽화:결정표_4.svg" descr="illust_8526821537926351853_1791769661.png"/>
           <p:cNvPicPr>
             <a:picLocks noChangeAspect="1"/>
           </p:cNvPicPr>
@@ -17909,7 +17909,7 @@
       </p:sp>
       <p:pic>
         <p:nvPicPr>
-          <p:cNvPr id="6" name="삽화:수직선_gt.svg" descr="illust_5456463612384645268_1791769661.png"/>
+          <p:cNvPr id="6" name="삽화:수직선_gt.svg" descr="illust_7976209246568311236_1791769661.png"/>
           <p:cNvPicPr>
             <a:picLocks noChangeAspect="1"/>
           </p:cNvPicPr>
@@ -21060,7 +21060,7 @@
       </p:sp>
       <p:pic>
         <p:nvPicPr>
-          <p:cNvPr id="6" name="삽화:성과경로_5.svg" descr="illust_1726730703120153186_1791769661.png"/>
+          <p:cNvPr id="6" name="삽화:성과경로_5.svg" descr="illust_5154440300141378237_1791769661.png"/>
           <p:cNvPicPr>
             <a:picLocks noChangeAspect="1"/>
           </p:cNvPicPr>
@@ -22119,7 +22119,7 @@
                 <a:ea typeface="맑은 고딕"/>
                 <a:cs typeface="맑은 고딕"/>
               </a:rPr>
-              <a:t>2  부하 70 %와 야간 핀 세척</a:t>
+              <a:t>공동 2  부하 70 %와 야간 핀 세척</a:t>
             </a:r>
           </a:p>
         </p:txBody>
@@ -22267,7 +22267,7 @@
                 <a:ea typeface="맑은 고딕"/>
                 <a:cs typeface="맑은 고딕"/>
               </a:rPr>
-              <a:t>3  팬 최대 운전과 부하 80 %</a:t>
+              <a:t>공동 2  팬 최대 운전과 부하 80 %</a:t>
             </a:r>
           </a:p>
         </p:txBody>
@@ -23510,7 +23510,7 @@
       </p:sp>
       <p:pic>
         <p:nvPicPr>
-          <p:cNvPr id="6" name="삽화:가정분석_2.svg" descr="illust_7215643909662461266_1791769661.png"/>
+          <p:cNvPr id="6" name="삽화:가정분석_2.svg" descr="illust_5822096683337579241_1791769661.png"/>
           <p:cNvPicPr>
             <a:picLocks noChangeAspect="1"/>
           </p:cNvPicPr>
@@ -31257,7 +31257,7 @@
                 <a:ea typeface="맑은 고딕"/>
                 <a:cs typeface="맑은 고딕"/>
               </a:rPr>
-              <a:t>배운 내용을 바탕으로 정답을 맞춰보세요.</a:t>
+              <a:t>배운 내용을 바탕으로 정답을 맞혀 보세요.</a:t>
             </a:r>
           </a:p>
         </p:txBody>
@@ -34903,7 +34903,7 @@
       </p:sp>
       <p:pic>
         <p:nvPicPr>
-          <p:cNvPr id="6" name="삽화:조치후보_0.svg" descr="illust_2046806163803392928_1791769661.png"/>
+          <p:cNvPr id="6" name="삽화:조치후보_0.svg" descr="illust_6134218420918634136_1791769661.png"/>
           <p:cNvPicPr>
             <a:picLocks noChangeAspect="1"/>
           </p:cNvPicPr>
@@ -35288,7 +35288,7 @@
       </p:sp>
       <p:pic>
         <p:nvPicPr>
-          <p:cNvPr id="6" name="삽화:조치후보_전체.svg" descr="illust_3615404750611448730_1791769661.png"/>
+          <p:cNvPr id="6" name="삽화:조치후보_전체.svg" descr="illust_8533086278217672823_1791769661.png"/>
           <p:cNvPicPr>
             <a:picLocks noChangeAspect="1"/>
           </p:cNvPicPr>

--- a/docs/교재/실전반_오프라인/02회차/실전반_오프라인_02회차.pptx
+++ b/docs/교재/실전반_오프라인/02회차/실전반_오프라인_02회차.pptx
@@ -7616,7 +7616,7 @@
       </p:sp>
       <p:pic>
         <p:nvPicPr>
-          <p:cNvPr id="6" name="삽화:SOP문서_all.svg" descr="illust_1639074730109756826_1791770880.png"/>
+          <p:cNvPr id="6" name="삽화:SOP문서_all.svg" descr="illust_5315161397951822264_1791770880.png"/>
           <p:cNvPicPr>
             <a:picLocks noChangeAspect="1"/>
           </p:cNvPicPr>
@@ -10136,7 +10136,7 @@
       </p:sp>
       <p:pic>
         <p:nvPicPr>
-          <p:cNvPr id="6" name="삽화:운전모드_3.svg" descr="illust_5312487430237631988_1791769661.png"/>
+          <p:cNvPr id="6" name="삽화:운전모드_3.svg" descr="illust_4544921722225759830_1791769661.png"/>
           <p:cNvPicPr>
             <a:picLocks noChangeAspect="1"/>
           </p:cNvPicPr>
@@ -16296,7 +16296,7 @@
       </p:sp>
       <p:pic>
         <p:nvPicPr>
-          <p:cNvPr id="6" name="삽화:결정표_4.svg" descr="illust_8526821537926351853_1791769661.png"/>
+          <p:cNvPr id="6" name="삽화:결정표_4.svg" descr="illust_5191833892352757967_1791769661.png"/>
           <p:cNvPicPr>
             <a:picLocks noChangeAspect="1"/>
           </p:cNvPicPr>
@@ -17909,7 +17909,7 @@
       </p:sp>
       <p:pic>
         <p:nvPicPr>
-          <p:cNvPr id="6" name="삽화:수직선_gt.svg" descr="illust_7976209246568311236_1791769661.png"/>
+          <p:cNvPr id="6" name="삽화:수직선_gt.svg" descr="illust_7361374058676546896_1791769661.png"/>
           <p:cNvPicPr>
             <a:picLocks noChangeAspect="1"/>
           </p:cNvPicPr>
@@ -21060,7 +21060,7 @@
       </p:sp>
       <p:pic>
         <p:nvPicPr>
-          <p:cNvPr id="6" name="삽화:성과경로_5.svg" descr="illust_5154440300141378237_1791769661.png"/>
+          <p:cNvPr id="6" name="삽화:성과경로_5.svg" descr="illust_3403882375332420837_1791769661.png"/>
           <p:cNvPicPr>
             <a:picLocks noChangeAspect="1"/>
           </p:cNvPicPr>
@@ -23510,7 +23510,7 @@
       </p:sp>
       <p:pic>
         <p:nvPicPr>
-          <p:cNvPr id="6" name="삽화:가정분석_2.svg" descr="illust_5822096683337579241_1791769661.png"/>
+          <p:cNvPr id="6" name="삽화:가정분석_2.svg" descr="illust_5223966150665011822_1791769661.png"/>
           <p:cNvPicPr>
             <a:picLocks noChangeAspect="1"/>
           </p:cNvPicPr>
@@ -27528,7 +27528,7 @@
                 <a:ea typeface="맑은 고딕"/>
                 <a:cs typeface="맑은 고딕"/>
               </a:rPr>
-              <a:t>결정표를 읽어 조치를 허용하거나 제외하고 사유를 보여 주는 기능을 Claude Code로 만든다</a:t>
+              <a:t>결정표를 읽어 조치를 허용하거나 제외하고 사유를 보여 주는 기능을 바이브 코딩으로 만든다</a:t>
             </a:r>
           </a:p>
         </p:txBody>
@@ -34903,7 +34903,7 @@
       </p:sp>
       <p:pic>
         <p:nvPicPr>
-          <p:cNvPr id="6" name="삽화:조치후보_0.svg" descr="illust_6134218420918634136_1791769661.png"/>
+          <p:cNvPr id="6" name="삽화:조치후보_0.svg" descr="illust_5922470186950380019_1791769661.png"/>
           <p:cNvPicPr>
             <a:picLocks noChangeAspect="1"/>
           </p:cNvPicPr>
@@ -35288,7 +35288,7 @@
       </p:sp>
       <p:pic>
         <p:nvPicPr>
-          <p:cNvPr id="6" name="삽화:조치후보_전체.svg" descr="illust_8533086278217672823_1791769661.png"/>
+          <p:cNvPr id="6" name="삽화:조치후보_전체.svg" descr="illust_6181850642206998841_1791769661.png"/>
           <p:cNvPicPr>
             <a:picLocks noChangeAspect="1"/>
           </p:cNvPicPr>
